--- a/ComputerProgramming-SmartManufacturing/Class 12 Modularity/Modularity.pptx
+++ b/ComputerProgramming-SmartManufacturing/Class 12 Modularity/Modularity.pptx
@@ -4,6 +4,17 @@
   <p:sldMasterIdLst>
     <p:sldMasterId id="2147483648" r:id="rId1"/>
   </p:sldMasterIdLst>
+  <p:sldIdLst>
+    <p:sldId id="256" r:id="rId2"/>
+    <p:sldId id="257" r:id="rId3"/>
+    <p:sldId id="258" r:id="rId4"/>
+    <p:sldId id="259" r:id="rId5"/>
+    <p:sldId id="260" r:id="rId6"/>
+    <p:sldId id="261" r:id="rId7"/>
+    <p:sldId id="262" r:id="rId8"/>
+    <p:sldId id="263" r:id="rId9"/>
+    <p:sldId id="264" r:id="rId10"/>
+  </p:sldIdLst>
   <p:sldSz cx="12192000" cy="6858000"/>
   <p:notesSz cx="6858000" cy="9144000"/>
   <p:defaultTextStyle>
@@ -101,6 +112,11 @@
       </a:defRPr>
     </a:lvl9pPr>
   </p:defaultTextStyle>
+  <p:extLst>
+    <p:ext uri="{EFAFB233-063F-42B5-8137-9DF3F51BA10A}">
+      <p15:sldGuideLst xmlns:p15="http://schemas.microsoft.com/office/powerpoint/2012/main"/>
+    </p:ext>
+  </p:extLst>
 </p:presentation>
 </file>
 
@@ -3299,6 +3315,994 @@
     </p:otherStyle>
   </p:txStyles>
 </p:sldMaster>
+</file>
+
+<file path=ppt/slides/slide1.xml><?xml version="1.0" encoding="utf-8"?>
+<p:sld xmlns:a="http://schemas.openxmlformats.org/drawingml/2006/main" xmlns:r="http://schemas.openxmlformats.org/officeDocument/2006/relationships" xmlns:p="http://schemas.openxmlformats.org/presentationml/2006/main">
+  <p:cSld>
+    <p:spTree>
+      <p:nvGrpSpPr>
+        <p:cNvPr id="1" name=""/>
+        <p:cNvGrpSpPr/>
+        <p:nvPr/>
+      </p:nvGrpSpPr>
+      <p:grpSpPr>
+        <a:xfrm>
+          <a:off x="0" y="0"/>
+          <a:ext cx="0" cy="0"/>
+          <a:chOff x="0" y="0"/>
+          <a:chExt cx="0" cy="0"/>
+        </a:xfrm>
+      </p:grpSpPr>
+      <p:sp>
+        <p:nvSpPr>
+          <p:cNvPr id="2" name="Title 1">
+            <a:extLst>
+              <a:ext uri="{FF2B5EF4-FFF2-40B4-BE49-F238E27FC236}">
+                <a16:creationId xmlns:a16="http://schemas.microsoft.com/office/drawing/2014/main" id="{FEC8E0CD-0490-DE09-FD98-0A02C71F373F}"/>
+              </a:ext>
+            </a:extLst>
+          </p:cNvPr>
+          <p:cNvSpPr>
+            <a:spLocks noGrp="1"/>
+          </p:cNvSpPr>
+          <p:nvPr>
+            <p:ph type="title"/>
+          </p:nvPr>
+        </p:nvSpPr>
+        <p:spPr/>
+        <p:txBody>
+          <a:bodyPr>
+            <a:normAutofit/>
+          </a:bodyPr>
+          <a:lstStyle/>
+          <a:p>
+            <a:r>
+              <a:rPr lang="en-US" b="1" dirty="0"/>
+              <a:t>What is Modularity?</a:t>
+            </a:r>
+            <a:br>
+              <a:rPr lang="en-US" b="1" dirty="0"/>
+            </a:br>
+            <a:endParaRPr lang="en-US" dirty="0"/>
+          </a:p>
+        </p:txBody>
+      </p:sp>
+      <p:sp>
+        <p:nvSpPr>
+          <p:cNvPr id="3" name="Content Placeholder 2">
+            <a:extLst>
+              <a:ext uri="{FF2B5EF4-FFF2-40B4-BE49-F238E27FC236}">
+                <a16:creationId xmlns:a16="http://schemas.microsoft.com/office/drawing/2014/main" id="{9177BF7A-52E9-5E7C-94E7-4CE80CD2B696}"/>
+              </a:ext>
+            </a:extLst>
+          </p:cNvPr>
+          <p:cNvSpPr>
+            <a:spLocks noGrp="1"/>
+          </p:cNvSpPr>
+          <p:nvPr>
+            <p:ph idx="1"/>
+          </p:nvPr>
+        </p:nvSpPr>
+        <p:spPr/>
+        <p:txBody>
+          <a:bodyPr/>
+          <a:lstStyle/>
+          <a:p>
+            <a:r>
+              <a:rPr lang="en-US" b="1" dirty="0"/>
+              <a:t>Definition:</a:t>
+            </a:r>
+            <a:r>
+              <a:rPr lang="en-US" dirty="0"/>
+              <a:t> Breaking down a program into smaller, reusable parts.</a:t>
+            </a:r>
+          </a:p>
+          <a:p>
+            <a:r>
+              <a:rPr lang="en-US" b="1" dirty="0"/>
+              <a:t>Key Concepts:</a:t>
+            </a:r>
+            <a:endParaRPr lang="en-US" dirty="0"/>
+          </a:p>
+          <a:p>
+            <a:pPr lvl="1"/>
+            <a:r>
+              <a:rPr lang="en-US" dirty="0"/>
+              <a:t>Functions</a:t>
+            </a:r>
+          </a:p>
+          <a:p>
+            <a:pPr lvl="1"/>
+            <a:r>
+              <a:rPr lang="en-US" dirty="0"/>
+              <a:t>Modules</a:t>
+            </a:r>
+          </a:p>
+          <a:p>
+            <a:pPr lvl="1"/>
+            <a:r>
+              <a:rPr lang="en-US" dirty="0"/>
+              <a:t>Packages</a:t>
+            </a:r>
+          </a:p>
+          <a:p>
+            <a:pPr marL="0" indent="0">
+              <a:buNone/>
+            </a:pPr>
+            <a:endParaRPr lang="en-US" dirty="0"/>
+          </a:p>
+        </p:txBody>
+      </p:sp>
+    </p:spTree>
+    <p:extLst>
+      <p:ext uri="{BB962C8B-B14F-4D97-AF65-F5344CB8AC3E}">
+        <p14:creationId xmlns:p14="http://schemas.microsoft.com/office/powerpoint/2010/main" val="3083715388"/>
+      </p:ext>
+    </p:extLst>
+  </p:cSld>
+  <p:clrMapOvr>
+    <a:masterClrMapping/>
+  </p:clrMapOvr>
+</p:sld>
+</file>
+
+<file path=ppt/slides/slide2.xml><?xml version="1.0" encoding="utf-8"?>
+<p:sld xmlns:a="http://schemas.openxmlformats.org/drawingml/2006/main" xmlns:r="http://schemas.openxmlformats.org/officeDocument/2006/relationships" xmlns:p="http://schemas.openxmlformats.org/presentationml/2006/main">
+  <p:cSld>
+    <p:spTree>
+      <p:nvGrpSpPr>
+        <p:cNvPr id="1" name=""/>
+        <p:cNvGrpSpPr/>
+        <p:nvPr/>
+      </p:nvGrpSpPr>
+      <p:grpSpPr>
+        <a:xfrm>
+          <a:off x="0" y="0"/>
+          <a:ext cx="0" cy="0"/>
+          <a:chOff x="0" y="0"/>
+          <a:chExt cx="0" cy="0"/>
+        </a:xfrm>
+      </p:grpSpPr>
+      <p:sp>
+        <p:nvSpPr>
+          <p:cNvPr id="2" name="Title 1">
+            <a:extLst>
+              <a:ext uri="{FF2B5EF4-FFF2-40B4-BE49-F238E27FC236}">
+                <a16:creationId xmlns:a16="http://schemas.microsoft.com/office/drawing/2014/main" id="{1C76C57D-EC4E-9283-E8C8-8B613731B001}"/>
+              </a:ext>
+            </a:extLst>
+          </p:cNvPr>
+          <p:cNvSpPr>
+            <a:spLocks noGrp="1"/>
+          </p:cNvSpPr>
+          <p:nvPr>
+            <p:ph type="title"/>
+          </p:nvPr>
+        </p:nvSpPr>
+        <p:spPr/>
+        <p:txBody>
+          <a:bodyPr/>
+          <a:lstStyle/>
+          <a:p>
+            <a:r>
+              <a:rPr lang="en-US" b="1" dirty="0"/>
+              <a:t>Benefits of Modularity</a:t>
+            </a:r>
+            <a:endParaRPr lang="en-US" dirty="0"/>
+          </a:p>
+        </p:txBody>
+      </p:sp>
+      <p:sp>
+        <p:nvSpPr>
+          <p:cNvPr id="3" name="Content Placeholder 2">
+            <a:extLst>
+              <a:ext uri="{FF2B5EF4-FFF2-40B4-BE49-F238E27FC236}">
+                <a16:creationId xmlns:a16="http://schemas.microsoft.com/office/drawing/2014/main" id="{BB15003E-F9A1-3708-A9C6-9BFF17292A07}"/>
+              </a:ext>
+            </a:extLst>
+          </p:cNvPr>
+          <p:cNvSpPr>
+            <a:spLocks noGrp="1"/>
+          </p:cNvSpPr>
+          <p:nvPr>
+            <p:ph idx="1"/>
+          </p:nvPr>
+        </p:nvSpPr>
+        <p:spPr/>
+        <p:txBody>
+          <a:bodyPr/>
+          <a:lstStyle/>
+          <a:p>
+            <a:r>
+              <a:rPr lang="en-US" b="1" dirty="0"/>
+              <a:t>Improves Code Readability and Maintainability</a:t>
+            </a:r>
+            <a:endParaRPr lang="en-US" dirty="0"/>
+          </a:p>
+          <a:p>
+            <a:r>
+              <a:rPr lang="en-US" b="1" dirty="0"/>
+              <a:t>Easier to Debug and Test</a:t>
+            </a:r>
+            <a:endParaRPr lang="en-US" dirty="0"/>
+          </a:p>
+          <a:p>
+            <a:r>
+              <a:rPr lang="en-US" b="1" dirty="0"/>
+              <a:t>Reusability of Code</a:t>
+            </a:r>
+            <a:endParaRPr lang="en-US" dirty="0"/>
+          </a:p>
+          <a:p>
+            <a:endParaRPr lang="en-US" dirty="0"/>
+          </a:p>
+        </p:txBody>
+      </p:sp>
+    </p:spTree>
+    <p:extLst>
+      <p:ext uri="{BB962C8B-B14F-4D97-AF65-F5344CB8AC3E}">
+        <p14:creationId xmlns:p14="http://schemas.microsoft.com/office/powerpoint/2010/main" val="146749567"/>
+      </p:ext>
+    </p:extLst>
+  </p:cSld>
+  <p:clrMapOvr>
+    <a:masterClrMapping/>
+  </p:clrMapOvr>
+</p:sld>
+</file>
+
+<file path=ppt/slides/slide3.xml><?xml version="1.0" encoding="utf-8"?>
+<p:sld xmlns:a="http://schemas.openxmlformats.org/drawingml/2006/main" xmlns:r="http://schemas.openxmlformats.org/officeDocument/2006/relationships" xmlns:p="http://schemas.openxmlformats.org/presentationml/2006/main">
+  <p:cSld>
+    <p:spTree>
+      <p:nvGrpSpPr>
+        <p:cNvPr id="1" name=""/>
+        <p:cNvGrpSpPr/>
+        <p:nvPr/>
+      </p:nvGrpSpPr>
+      <p:grpSpPr>
+        <a:xfrm>
+          <a:off x="0" y="0"/>
+          <a:ext cx="0" cy="0"/>
+          <a:chOff x="0" y="0"/>
+          <a:chExt cx="0" cy="0"/>
+        </a:xfrm>
+      </p:grpSpPr>
+      <p:sp>
+        <p:nvSpPr>
+          <p:cNvPr id="2" name="Title 1">
+            <a:extLst>
+              <a:ext uri="{FF2B5EF4-FFF2-40B4-BE49-F238E27FC236}">
+                <a16:creationId xmlns:a16="http://schemas.microsoft.com/office/drawing/2014/main" id="{3CC78A1D-5CA5-2F2F-0869-36388C55FAF4}"/>
+              </a:ext>
+            </a:extLst>
+          </p:cNvPr>
+          <p:cNvSpPr>
+            <a:spLocks noGrp="1"/>
+          </p:cNvSpPr>
+          <p:nvPr>
+            <p:ph type="title"/>
+          </p:nvPr>
+        </p:nvSpPr>
+        <p:spPr/>
+        <p:txBody>
+          <a:bodyPr/>
+          <a:lstStyle/>
+          <a:p>
+            <a:r>
+              <a:rPr lang="en-US" b="1" dirty="0"/>
+              <a:t>Creating Functions</a:t>
+            </a:r>
+            <a:endParaRPr lang="en-US" dirty="0"/>
+          </a:p>
+        </p:txBody>
+      </p:sp>
+      <p:sp>
+        <p:nvSpPr>
+          <p:cNvPr id="3" name="Content Placeholder 2">
+            <a:extLst>
+              <a:ext uri="{FF2B5EF4-FFF2-40B4-BE49-F238E27FC236}">
+                <a16:creationId xmlns:a16="http://schemas.microsoft.com/office/drawing/2014/main" id="{EFE09222-AA49-C671-CCF8-AB38FC96D6A5}"/>
+              </a:ext>
+            </a:extLst>
+          </p:cNvPr>
+          <p:cNvSpPr>
+            <a:spLocks noGrp="1"/>
+          </p:cNvSpPr>
+          <p:nvPr>
+            <p:ph idx="1"/>
+          </p:nvPr>
+        </p:nvSpPr>
+        <p:spPr/>
+        <p:txBody>
+          <a:bodyPr/>
+          <a:lstStyle/>
+          <a:p>
+            <a:r>
+              <a:rPr lang="en-US" b="1" dirty="0"/>
+              <a:t>Definition:</a:t>
+            </a:r>
+            <a:r>
+              <a:rPr lang="en-US" dirty="0"/>
+              <a:t> A block of reusable code that performs a specific task.</a:t>
+            </a:r>
+          </a:p>
+          <a:p>
+            <a:r>
+              <a:rPr lang="en-US" b="1" dirty="0"/>
+              <a:t>Example:</a:t>
+            </a:r>
+            <a:endParaRPr lang="en-US" dirty="0"/>
+          </a:p>
+          <a:p>
+            <a:endParaRPr lang="en-US" dirty="0"/>
+          </a:p>
+        </p:txBody>
+      </p:sp>
+      <p:pic>
+        <p:nvPicPr>
+          <p:cNvPr id="6" name="Picture 5">
+            <a:extLst>
+              <a:ext uri="{FF2B5EF4-FFF2-40B4-BE49-F238E27FC236}">
+                <a16:creationId xmlns:a16="http://schemas.microsoft.com/office/drawing/2014/main" id="{1B21DC26-D680-8A31-44FC-187A5CB9E1AB}"/>
+              </a:ext>
+            </a:extLst>
+          </p:cNvPr>
+          <p:cNvPicPr>
+            <a:picLocks noChangeAspect="1"/>
+          </p:cNvPicPr>
+          <p:nvPr/>
+        </p:nvPicPr>
+        <p:blipFill>
+          <a:blip r:embed="rId2"/>
+          <a:stretch>
+            <a:fillRect/>
+          </a:stretch>
+        </p:blipFill>
+        <p:spPr>
+          <a:xfrm>
+            <a:off x="1215605" y="3137698"/>
+            <a:ext cx="2772162" cy="1562318"/>
+          </a:xfrm>
+          <a:prstGeom prst="rect">
+            <a:avLst/>
+          </a:prstGeom>
+        </p:spPr>
+      </p:pic>
+    </p:spTree>
+    <p:extLst>
+      <p:ext uri="{BB962C8B-B14F-4D97-AF65-F5344CB8AC3E}">
+        <p14:creationId xmlns:p14="http://schemas.microsoft.com/office/powerpoint/2010/main" val="1972837414"/>
+      </p:ext>
+    </p:extLst>
+  </p:cSld>
+  <p:clrMapOvr>
+    <a:masterClrMapping/>
+  </p:clrMapOvr>
+</p:sld>
+</file>
+
+<file path=ppt/slides/slide4.xml><?xml version="1.0" encoding="utf-8"?>
+<p:sld xmlns:a="http://schemas.openxmlformats.org/drawingml/2006/main" xmlns:r="http://schemas.openxmlformats.org/officeDocument/2006/relationships" xmlns:p="http://schemas.openxmlformats.org/presentationml/2006/main">
+  <p:cSld>
+    <p:spTree>
+      <p:nvGrpSpPr>
+        <p:cNvPr id="1" name=""/>
+        <p:cNvGrpSpPr/>
+        <p:nvPr/>
+      </p:nvGrpSpPr>
+      <p:grpSpPr>
+        <a:xfrm>
+          <a:off x="0" y="0"/>
+          <a:ext cx="0" cy="0"/>
+          <a:chOff x="0" y="0"/>
+          <a:chExt cx="0" cy="0"/>
+        </a:xfrm>
+      </p:grpSpPr>
+      <p:sp>
+        <p:nvSpPr>
+          <p:cNvPr id="2" name="Title 1">
+            <a:extLst>
+              <a:ext uri="{FF2B5EF4-FFF2-40B4-BE49-F238E27FC236}">
+                <a16:creationId xmlns:a16="http://schemas.microsoft.com/office/drawing/2014/main" id="{956F6AAA-77BE-749F-023A-FB010CEDF28E}"/>
+              </a:ext>
+            </a:extLst>
+          </p:cNvPr>
+          <p:cNvSpPr>
+            <a:spLocks noGrp="1"/>
+          </p:cNvSpPr>
+          <p:nvPr>
+            <p:ph type="title"/>
+          </p:nvPr>
+        </p:nvSpPr>
+        <p:spPr/>
+        <p:txBody>
+          <a:bodyPr/>
+          <a:lstStyle/>
+          <a:p>
+            <a:r>
+              <a:rPr lang="en-US" b="1" dirty="0"/>
+              <a:t>More Function Examples</a:t>
+            </a:r>
+            <a:endParaRPr lang="en-US" dirty="0"/>
+          </a:p>
+        </p:txBody>
+      </p:sp>
+      <p:pic>
+        <p:nvPicPr>
+          <p:cNvPr id="5" name="Content Placeholder 4">
+            <a:extLst>
+              <a:ext uri="{FF2B5EF4-FFF2-40B4-BE49-F238E27FC236}">
+                <a16:creationId xmlns:a16="http://schemas.microsoft.com/office/drawing/2014/main" id="{D04F399F-94A3-26ED-8DF4-298A7494EB03}"/>
+              </a:ext>
+            </a:extLst>
+          </p:cNvPr>
+          <p:cNvPicPr>
+            <a:picLocks noGrp="1" noChangeAspect="1"/>
+          </p:cNvPicPr>
+          <p:nvPr>
+            <p:ph idx="1"/>
+          </p:nvPr>
+        </p:nvPicPr>
+        <p:blipFill>
+          <a:blip r:embed="rId2"/>
+          <a:stretch>
+            <a:fillRect/>
+          </a:stretch>
+        </p:blipFill>
+        <p:spPr>
+          <a:xfrm>
+            <a:off x="4309813" y="2967687"/>
+            <a:ext cx="3572374" cy="2067213"/>
+          </a:xfrm>
+          <a:prstGeom prst="rect">
+            <a:avLst/>
+          </a:prstGeom>
+        </p:spPr>
+      </p:pic>
+    </p:spTree>
+    <p:extLst>
+      <p:ext uri="{BB962C8B-B14F-4D97-AF65-F5344CB8AC3E}">
+        <p14:creationId xmlns:p14="http://schemas.microsoft.com/office/powerpoint/2010/main" val="2888246853"/>
+      </p:ext>
+    </p:extLst>
+  </p:cSld>
+  <p:clrMapOvr>
+    <a:masterClrMapping/>
+  </p:clrMapOvr>
+</p:sld>
+</file>
+
+<file path=ppt/slides/slide5.xml><?xml version="1.0" encoding="utf-8"?>
+<p:sld xmlns:a="http://schemas.openxmlformats.org/drawingml/2006/main" xmlns:r="http://schemas.openxmlformats.org/officeDocument/2006/relationships" xmlns:p="http://schemas.openxmlformats.org/presentationml/2006/main">
+  <p:cSld>
+    <p:spTree>
+      <p:nvGrpSpPr>
+        <p:cNvPr id="1" name=""/>
+        <p:cNvGrpSpPr/>
+        <p:nvPr/>
+      </p:nvGrpSpPr>
+      <p:grpSpPr>
+        <a:xfrm>
+          <a:off x="0" y="0"/>
+          <a:ext cx="0" cy="0"/>
+          <a:chOff x="0" y="0"/>
+          <a:chExt cx="0" cy="0"/>
+        </a:xfrm>
+      </p:grpSpPr>
+      <p:sp>
+        <p:nvSpPr>
+          <p:cNvPr id="2" name="Title 1">
+            <a:extLst>
+              <a:ext uri="{FF2B5EF4-FFF2-40B4-BE49-F238E27FC236}">
+                <a16:creationId xmlns:a16="http://schemas.microsoft.com/office/drawing/2014/main" id="{FAF5BE5F-B916-1CB7-F06D-AA9C07063F49}"/>
+              </a:ext>
+            </a:extLst>
+          </p:cNvPr>
+          <p:cNvSpPr>
+            <a:spLocks noGrp="1"/>
+          </p:cNvSpPr>
+          <p:nvPr>
+            <p:ph type="title"/>
+          </p:nvPr>
+        </p:nvSpPr>
+        <p:spPr/>
+        <p:txBody>
+          <a:bodyPr/>
+          <a:lstStyle/>
+          <a:p>
+            <a:r>
+              <a:rPr lang="en-US" b="1" dirty="0"/>
+              <a:t>Introduction to Modules</a:t>
+            </a:r>
+            <a:endParaRPr lang="en-US" dirty="0"/>
+          </a:p>
+        </p:txBody>
+      </p:sp>
+      <p:sp>
+        <p:nvSpPr>
+          <p:cNvPr id="3" name="Content Placeholder 2">
+            <a:extLst>
+              <a:ext uri="{FF2B5EF4-FFF2-40B4-BE49-F238E27FC236}">
+                <a16:creationId xmlns:a16="http://schemas.microsoft.com/office/drawing/2014/main" id="{8779EE21-B270-49E3-A9FE-3C3C81C7ECF4}"/>
+              </a:ext>
+            </a:extLst>
+          </p:cNvPr>
+          <p:cNvSpPr>
+            <a:spLocks noGrp="1"/>
+          </p:cNvSpPr>
+          <p:nvPr>
+            <p:ph idx="1"/>
+          </p:nvPr>
+        </p:nvSpPr>
+        <p:spPr/>
+        <p:txBody>
+          <a:bodyPr/>
+          <a:lstStyle/>
+          <a:p>
+            <a:r>
+              <a:rPr lang="en-US" b="1" dirty="0"/>
+              <a:t>Definition:</a:t>
+            </a:r>
+            <a:r>
+              <a:rPr lang="en-US" dirty="0"/>
+              <a:t> A file containing Python code (functions, classes, variables) that can be imported and used in other programs.</a:t>
+            </a:r>
+          </a:p>
+          <a:p>
+            <a:r>
+              <a:rPr lang="en-US" b="1" dirty="0"/>
+              <a:t>Creating a Module:</a:t>
+            </a:r>
+            <a:endParaRPr lang="en-US" dirty="0"/>
+          </a:p>
+          <a:p>
+            <a:pPr lvl="1"/>
+            <a:r>
+              <a:rPr lang="en-US" dirty="0"/>
+              <a:t>Create a file import_experiment.py</a:t>
+            </a:r>
+          </a:p>
+          <a:p>
+            <a:pPr lvl="1"/>
+            <a:r>
+              <a:rPr lang="en-US" dirty="0"/>
+              <a:t>Define functions or classes inside it.</a:t>
+            </a:r>
+          </a:p>
+          <a:p>
+            <a:pPr marL="0" indent="0">
+              <a:buNone/>
+            </a:pPr>
+            <a:endParaRPr lang="en-US" dirty="0"/>
+          </a:p>
+        </p:txBody>
+      </p:sp>
+    </p:spTree>
+    <p:extLst>
+      <p:ext uri="{BB962C8B-B14F-4D97-AF65-F5344CB8AC3E}">
+        <p14:creationId xmlns:p14="http://schemas.microsoft.com/office/powerpoint/2010/main" val="4255424628"/>
+      </p:ext>
+    </p:extLst>
+  </p:cSld>
+  <p:clrMapOvr>
+    <a:masterClrMapping/>
+  </p:clrMapOvr>
+</p:sld>
+</file>
+
+<file path=ppt/slides/slide6.xml><?xml version="1.0" encoding="utf-8"?>
+<p:sld xmlns:a="http://schemas.openxmlformats.org/drawingml/2006/main" xmlns:r="http://schemas.openxmlformats.org/officeDocument/2006/relationships" xmlns:p="http://schemas.openxmlformats.org/presentationml/2006/main">
+  <p:cSld>
+    <p:spTree>
+      <p:nvGrpSpPr>
+        <p:cNvPr id="1" name=""/>
+        <p:cNvGrpSpPr/>
+        <p:nvPr/>
+      </p:nvGrpSpPr>
+      <p:grpSpPr>
+        <a:xfrm>
+          <a:off x="0" y="0"/>
+          <a:ext cx="0" cy="0"/>
+          <a:chOff x="0" y="0"/>
+          <a:chExt cx="0" cy="0"/>
+        </a:xfrm>
+      </p:grpSpPr>
+      <p:sp>
+        <p:nvSpPr>
+          <p:cNvPr id="2" name="Title 1">
+            <a:extLst>
+              <a:ext uri="{FF2B5EF4-FFF2-40B4-BE49-F238E27FC236}">
+                <a16:creationId xmlns:a16="http://schemas.microsoft.com/office/drawing/2014/main" id="{A28B15ED-050A-DFE2-E4D7-61C941325F31}"/>
+              </a:ext>
+            </a:extLst>
+          </p:cNvPr>
+          <p:cNvSpPr>
+            <a:spLocks noGrp="1"/>
+          </p:cNvSpPr>
+          <p:nvPr>
+            <p:ph type="title"/>
+          </p:nvPr>
+        </p:nvSpPr>
+        <p:spPr/>
+        <p:txBody>
+          <a:bodyPr/>
+          <a:lstStyle/>
+          <a:p>
+            <a:r>
+              <a:rPr lang="en-US" b="1" dirty="0"/>
+              <a:t>Using Modules</a:t>
+            </a:r>
+            <a:endParaRPr lang="en-US" dirty="0"/>
+          </a:p>
+        </p:txBody>
+      </p:sp>
+      <p:pic>
+        <p:nvPicPr>
+          <p:cNvPr id="6" name="Content Placeholder 5">
+            <a:extLst>
+              <a:ext uri="{FF2B5EF4-FFF2-40B4-BE49-F238E27FC236}">
+                <a16:creationId xmlns:a16="http://schemas.microsoft.com/office/drawing/2014/main" id="{FA962D6F-ECD2-F1EF-9F59-965724E154FC}"/>
+              </a:ext>
+            </a:extLst>
+          </p:cNvPr>
+          <p:cNvPicPr>
+            <a:picLocks noGrp="1" noChangeAspect="1"/>
+          </p:cNvPicPr>
+          <p:nvPr>
+            <p:ph idx="1"/>
+          </p:nvPr>
+        </p:nvPicPr>
+        <p:blipFill>
+          <a:blip r:embed="rId2"/>
+          <a:stretch>
+            <a:fillRect/>
+          </a:stretch>
+        </p:blipFill>
+        <p:spPr>
+          <a:xfrm>
+            <a:off x="4076418" y="2891476"/>
+            <a:ext cx="4039164" cy="2219635"/>
+          </a:xfrm>
+          <a:prstGeom prst="rect">
+            <a:avLst/>
+          </a:prstGeom>
+        </p:spPr>
+      </p:pic>
+    </p:spTree>
+    <p:extLst>
+      <p:ext uri="{BB962C8B-B14F-4D97-AF65-F5344CB8AC3E}">
+        <p14:creationId xmlns:p14="http://schemas.microsoft.com/office/powerpoint/2010/main" val="3515455860"/>
+      </p:ext>
+    </p:extLst>
+  </p:cSld>
+  <p:clrMapOvr>
+    <a:masterClrMapping/>
+  </p:clrMapOvr>
+</p:sld>
+</file>
+
+<file path=ppt/slides/slide7.xml><?xml version="1.0" encoding="utf-8"?>
+<p:sld xmlns:a="http://schemas.openxmlformats.org/drawingml/2006/main" xmlns:r="http://schemas.openxmlformats.org/officeDocument/2006/relationships" xmlns:p="http://schemas.openxmlformats.org/presentationml/2006/main">
+  <p:cSld>
+    <p:spTree>
+      <p:nvGrpSpPr>
+        <p:cNvPr id="1" name=""/>
+        <p:cNvGrpSpPr/>
+        <p:nvPr/>
+      </p:nvGrpSpPr>
+      <p:grpSpPr>
+        <a:xfrm>
+          <a:off x="0" y="0"/>
+          <a:ext cx="0" cy="0"/>
+          <a:chOff x="0" y="0"/>
+          <a:chExt cx="0" cy="0"/>
+        </a:xfrm>
+      </p:grpSpPr>
+      <p:sp>
+        <p:nvSpPr>
+          <p:cNvPr id="2" name="Title 1">
+            <a:extLst>
+              <a:ext uri="{FF2B5EF4-FFF2-40B4-BE49-F238E27FC236}">
+                <a16:creationId xmlns:a16="http://schemas.microsoft.com/office/drawing/2014/main" id="{7F451070-0588-25D6-7A18-6224F72C00AF}"/>
+              </a:ext>
+            </a:extLst>
+          </p:cNvPr>
+          <p:cNvSpPr>
+            <a:spLocks noGrp="1"/>
+          </p:cNvSpPr>
+          <p:nvPr>
+            <p:ph type="title"/>
+          </p:nvPr>
+        </p:nvSpPr>
+        <p:spPr/>
+        <p:txBody>
+          <a:bodyPr/>
+          <a:lstStyle/>
+          <a:p>
+            <a:r>
+              <a:rPr lang="en-US" b="1" dirty="0"/>
+              <a:t>Introduction to Packages</a:t>
+            </a:r>
+            <a:endParaRPr lang="en-US" dirty="0"/>
+          </a:p>
+        </p:txBody>
+      </p:sp>
+      <p:sp>
+        <p:nvSpPr>
+          <p:cNvPr id="3" name="Content Placeholder 2">
+            <a:extLst>
+              <a:ext uri="{FF2B5EF4-FFF2-40B4-BE49-F238E27FC236}">
+                <a16:creationId xmlns:a16="http://schemas.microsoft.com/office/drawing/2014/main" id="{6E0E561A-4999-CBCA-0EF0-37B5BE2B279F}"/>
+              </a:ext>
+            </a:extLst>
+          </p:cNvPr>
+          <p:cNvSpPr>
+            <a:spLocks noGrp="1"/>
+          </p:cNvSpPr>
+          <p:nvPr>
+            <p:ph idx="1"/>
+          </p:nvPr>
+        </p:nvSpPr>
+        <p:spPr/>
+        <p:txBody>
+          <a:bodyPr/>
+          <a:lstStyle/>
+          <a:p>
+            <a:r>
+              <a:rPr lang="en-US" b="1" dirty="0"/>
+              <a:t>Definition:</a:t>
+            </a:r>
+            <a:r>
+              <a:rPr lang="en-US" dirty="0"/>
+              <a:t> A directory containing multiple modules and a special __init__.py file.</a:t>
+            </a:r>
+          </a:p>
+          <a:p>
+            <a:r>
+              <a:rPr lang="en-US" b="1" dirty="0"/>
+              <a:t>Creating a Package:</a:t>
+            </a:r>
+            <a:endParaRPr lang="en-US" dirty="0"/>
+          </a:p>
+          <a:p>
+            <a:pPr lvl="1"/>
+            <a:r>
+              <a:rPr lang="en-US" dirty="0"/>
+              <a:t>Create a directory utilities</a:t>
+            </a:r>
+          </a:p>
+          <a:p>
+            <a:pPr lvl="1"/>
+            <a:r>
+              <a:rPr lang="en-US" dirty="0"/>
+              <a:t>Add modules like import_experiment.py and string_utils.py</a:t>
+            </a:r>
+          </a:p>
+          <a:p>
+            <a:pPr lvl="1"/>
+            <a:r>
+              <a:rPr lang="en-US" dirty="0"/>
+              <a:t>Add an __init__.py file</a:t>
+            </a:r>
+          </a:p>
+          <a:p>
+            <a:pPr marL="0" indent="0">
+              <a:buNone/>
+            </a:pPr>
+            <a:endParaRPr lang="en-US" dirty="0"/>
+          </a:p>
+        </p:txBody>
+      </p:sp>
+    </p:spTree>
+    <p:extLst>
+      <p:ext uri="{BB962C8B-B14F-4D97-AF65-F5344CB8AC3E}">
+        <p14:creationId xmlns:p14="http://schemas.microsoft.com/office/powerpoint/2010/main" val="1359659254"/>
+      </p:ext>
+    </p:extLst>
+  </p:cSld>
+  <p:clrMapOvr>
+    <a:masterClrMapping/>
+  </p:clrMapOvr>
+</p:sld>
+</file>
+
+<file path=ppt/slides/slide8.xml><?xml version="1.0" encoding="utf-8"?>
+<p:sld xmlns:a="http://schemas.openxmlformats.org/drawingml/2006/main" xmlns:r="http://schemas.openxmlformats.org/officeDocument/2006/relationships" xmlns:p="http://schemas.openxmlformats.org/presentationml/2006/main">
+  <p:cSld>
+    <p:spTree>
+      <p:nvGrpSpPr>
+        <p:cNvPr id="1" name=""/>
+        <p:cNvGrpSpPr/>
+        <p:nvPr/>
+      </p:nvGrpSpPr>
+      <p:grpSpPr>
+        <a:xfrm>
+          <a:off x="0" y="0"/>
+          <a:ext cx="0" cy="0"/>
+          <a:chOff x="0" y="0"/>
+          <a:chExt cx="0" cy="0"/>
+        </a:xfrm>
+      </p:grpSpPr>
+      <p:sp>
+        <p:nvSpPr>
+          <p:cNvPr id="2" name="Title 1">
+            <a:extLst>
+              <a:ext uri="{FF2B5EF4-FFF2-40B4-BE49-F238E27FC236}">
+                <a16:creationId xmlns:a16="http://schemas.microsoft.com/office/drawing/2014/main" id="{441796E4-223E-68C0-EA82-7D67CBF03709}"/>
+              </a:ext>
+            </a:extLst>
+          </p:cNvPr>
+          <p:cNvSpPr>
+            <a:spLocks noGrp="1"/>
+          </p:cNvSpPr>
+          <p:nvPr>
+            <p:ph type="title"/>
+          </p:nvPr>
+        </p:nvSpPr>
+        <p:spPr/>
+        <p:txBody>
+          <a:bodyPr/>
+          <a:lstStyle/>
+          <a:p>
+            <a:r>
+              <a:rPr lang="en-US" b="1" dirty="0"/>
+              <a:t>Using Packages</a:t>
+            </a:r>
+            <a:endParaRPr lang="en-US" dirty="0"/>
+          </a:p>
+        </p:txBody>
+      </p:sp>
+      <p:pic>
+        <p:nvPicPr>
+          <p:cNvPr id="5" name="Content Placeholder 4">
+            <a:extLst>
+              <a:ext uri="{FF2B5EF4-FFF2-40B4-BE49-F238E27FC236}">
+                <a16:creationId xmlns:a16="http://schemas.microsoft.com/office/drawing/2014/main" id="{C94E2A61-B0ED-32B2-E2DD-BDEB7DEBC7C3}"/>
+              </a:ext>
+            </a:extLst>
+          </p:cNvPr>
+          <p:cNvPicPr>
+            <a:picLocks noGrp="1" noChangeAspect="1"/>
+          </p:cNvPicPr>
+          <p:nvPr>
+            <p:ph idx="1"/>
+          </p:nvPr>
+        </p:nvPicPr>
+        <p:blipFill>
+          <a:blip r:embed="rId2"/>
+          <a:stretch>
+            <a:fillRect/>
+          </a:stretch>
+        </p:blipFill>
+        <p:spPr>
+          <a:xfrm>
+            <a:off x="4266944" y="3058187"/>
+            <a:ext cx="3658111" cy="1886213"/>
+          </a:xfrm>
+          <a:prstGeom prst="rect">
+            <a:avLst/>
+          </a:prstGeom>
+        </p:spPr>
+      </p:pic>
+    </p:spTree>
+    <p:extLst>
+      <p:ext uri="{BB962C8B-B14F-4D97-AF65-F5344CB8AC3E}">
+        <p14:creationId xmlns:p14="http://schemas.microsoft.com/office/powerpoint/2010/main" val="933091474"/>
+      </p:ext>
+    </p:extLst>
+  </p:cSld>
+  <p:clrMapOvr>
+    <a:masterClrMapping/>
+  </p:clrMapOvr>
+</p:sld>
+</file>
+
+<file path=ppt/slides/slide9.xml><?xml version="1.0" encoding="utf-8"?>
+<p:sld xmlns:a="http://schemas.openxmlformats.org/drawingml/2006/main" xmlns:r="http://schemas.openxmlformats.org/officeDocument/2006/relationships" xmlns:p="http://schemas.openxmlformats.org/presentationml/2006/main">
+  <p:cSld>
+    <p:spTree>
+      <p:nvGrpSpPr>
+        <p:cNvPr id="1" name=""/>
+        <p:cNvGrpSpPr/>
+        <p:nvPr/>
+      </p:nvGrpSpPr>
+      <p:grpSpPr>
+        <a:xfrm>
+          <a:off x="0" y="0"/>
+          <a:ext cx="0" cy="0"/>
+          <a:chOff x="0" y="0"/>
+          <a:chExt cx="0" cy="0"/>
+        </a:xfrm>
+      </p:grpSpPr>
+      <p:sp>
+        <p:nvSpPr>
+          <p:cNvPr id="2" name="Title 1">
+            <a:extLst>
+              <a:ext uri="{FF2B5EF4-FFF2-40B4-BE49-F238E27FC236}">
+                <a16:creationId xmlns:a16="http://schemas.microsoft.com/office/drawing/2014/main" id="{46CC68ED-84EB-F386-F30B-2E009ADABB83}"/>
+              </a:ext>
+            </a:extLst>
+          </p:cNvPr>
+          <p:cNvSpPr>
+            <a:spLocks noGrp="1"/>
+          </p:cNvSpPr>
+          <p:nvPr>
+            <p:ph type="title"/>
+          </p:nvPr>
+        </p:nvSpPr>
+        <p:spPr/>
+        <p:txBody>
+          <a:bodyPr/>
+          <a:lstStyle/>
+          <a:p>
+            <a:r>
+              <a:rPr lang="en-US" dirty="0"/>
+              <a:t>Conclusion</a:t>
+            </a:r>
+          </a:p>
+        </p:txBody>
+      </p:sp>
+      <p:sp>
+        <p:nvSpPr>
+          <p:cNvPr id="3" name="Content Placeholder 2">
+            <a:extLst>
+              <a:ext uri="{FF2B5EF4-FFF2-40B4-BE49-F238E27FC236}">
+                <a16:creationId xmlns:a16="http://schemas.microsoft.com/office/drawing/2014/main" id="{D8B71AE9-650C-A860-5C53-2E356859CDD7}"/>
+              </a:ext>
+            </a:extLst>
+          </p:cNvPr>
+          <p:cNvSpPr>
+            <a:spLocks noGrp="1"/>
+          </p:cNvSpPr>
+          <p:nvPr>
+            <p:ph idx="1"/>
+          </p:nvPr>
+        </p:nvSpPr>
+        <p:spPr/>
+        <p:txBody>
+          <a:bodyPr/>
+          <a:lstStyle/>
+          <a:p>
+            <a:r>
+              <a:rPr lang="en-US" b="1" dirty="0"/>
+              <a:t>Summary:</a:t>
+            </a:r>
+            <a:r>
+              <a:rPr lang="en-US" dirty="0"/>
+              <a:t> Modularity enhances code organization, readability, and reusability.</a:t>
+            </a:r>
+          </a:p>
+          <a:p>
+            <a:r>
+              <a:rPr lang="en-US" b="1"/>
+              <a:t>Encouragement:</a:t>
+            </a:r>
+            <a:r>
+              <a:rPr lang="en-US"/>
+              <a:t> Practice creating and using functions, modules, and packages in your projects!</a:t>
+            </a:r>
+          </a:p>
+          <a:p>
+            <a:pPr marL="0" indent="0">
+              <a:buNone/>
+            </a:pPr>
+            <a:endParaRPr lang="en-US"/>
+          </a:p>
+        </p:txBody>
+      </p:sp>
+    </p:spTree>
+    <p:extLst>
+      <p:ext uri="{BB962C8B-B14F-4D97-AF65-F5344CB8AC3E}">
+        <p14:creationId xmlns:p14="http://schemas.microsoft.com/office/powerpoint/2010/main" val="3339833185"/>
+      </p:ext>
+    </p:extLst>
+  </p:cSld>
+  <p:clrMapOvr>
+    <a:masterClrMapping/>
+  </p:clrMapOvr>
+</p:sld>
 </file>
 
 <file path=ppt/theme/theme1.xml><?xml version="1.0" encoding="utf-8"?>
